--- a/20260907_八十吉_ご予約の流れ_予約状況ビュー版.pptx
+++ b/20260907_八十吉_ご予約の流れ_予約状況ビュー版.pptx
@@ -905,8 +905,6 @@
                   <a:srgbClr val="1F285A"/>
                 </a:solidFill>
                 <a:latin typeface="メイリオ" pitchFamily="34" charset="0"/>
-                <a:ea typeface="メイリオ"/>
-                <a:cs typeface="メイリオ"/>
                 <a:ea typeface="メイリオ" pitchFamily="34" charset="-122"/>
                 <a:cs typeface="メイリオ" pitchFamily="34" charset="-120"/>
               </a:rPr>
@@ -946,8 +944,6 @@
                   <a:srgbClr val="6B7280"/>
                 </a:solidFill>
                 <a:latin typeface="メイリオ" pitchFamily="34" charset="0"/>
-                <a:ea typeface="メイリオ"/>
-                <a:cs typeface="メイリオ"/>
                 <a:ea typeface="メイリオ" pitchFamily="34" charset="-122"/>
                 <a:cs typeface="メイリオ" pitchFamily="34" charset="-120"/>
               </a:rPr>
@@ -1014,8 +1010,6 @@
                   <a:srgbClr val="0B7A3A"/>
                 </a:solidFill>
                 <a:latin typeface="メイリオ" pitchFamily="34" charset="0"/>
-                <a:ea typeface="メイリオ"/>
-                <a:cs typeface="メイリオ"/>
                 <a:ea typeface="メイリオ" pitchFamily="34" charset="-122"/>
                 <a:cs typeface="メイリオ" pitchFamily="34" charset="-120"/>
               </a:rPr>
@@ -1082,8 +1076,6 @@
                   <a:srgbClr val="1F285A"/>
                 </a:solidFill>
                 <a:latin typeface="メイリオ" pitchFamily="34" charset="0"/>
-                <a:ea typeface="メイリオ"/>
-                <a:cs typeface="メイリオ"/>
                 <a:ea typeface="メイリオ" pitchFamily="34" charset="-122"/>
                 <a:cs typeface="メイリオ" pitchFamily="34" charset="-120"/>
               </a:rPr>
@@ -1150,8 +1142,6 @@
                   <a:srgbClr val="D9661F"/>
                 </a:solidFill>
                 <a:latin typeface="メイリオ" pitchFamily="34" charset="0"/>
-                <a:ea typeface="メイリオ"/>
-                <a:cs typeface="メイリオ"/>
                 <a:ea typeface="メイリオ" pitchFamily="34" charset="-122"/>
                 <a:cs typeface="メイリオ" pitchFamily="34" charset="-120"/>
               </a:rPr>
@@ -1216,8 +1206,6 @@
                   <a:srgbClr val="FFFFFF"/>
                 </a:solidFill>
                 <a:latin typeface="メイリオ" pitchFamily="34" charset="0"/>
-                <a:ea typeface="メイリオ"/>
-                <a:cs typeface="メイリオ"/>
                 <a:ea typeface="メイリオ" pitchFamily="34" charset="-122"/>
                 <a:cs typeface="メイリオ" pitchFamily="34" charset="-120"/>
               </a:rPr>
@@ -1284,8 +1272,6 @@
                   <a:srgbClr val="0B7A3A"/>
                 </a:solidFill>
                 <a:latin typeface="メイリオ" pitchFamily="34" charset="0"/>
-                <a:ea typeface="メイリオ"/>
-                <a:cs typeface="メイリオ"/>
                 <a:ea typeface="メイリオ" pitchFamily="34" charset="-122"/>
                 <a:cs typeface="メイリオ" pitchFamily="34" charset="-120"/>
               </a:rPr>
@@ -1328,8 +1314,6 @@
                   <a:srgbClr val="1F285A"/>
                 </a:solidFill>
                 <a:latin typeface="メイリオ" pitchFamily="34" charset="0"/>
-                <a:ea typeface="メイリオ"/>
-                <a:cs typeface="メイリオ"/>
                 <a:ea typeface="メイリオ" pitchFamily="34" charset="-122"/>
                 <a:cs typeface="メイリオ" pitchFamily="34" charset="-120"/>
               </a:rPr>
@@ -1350,8 +1334,6 @@
                   <a:srgbClr val="333333"/>
                 </a:solidFill>
                 <a:latin typeface="メイリオ" pitchFamily="34" charset="0"/>
-                <a:ea typeface="メイリオ"/>
-                <a:cs typeface="メイリオ"/>
                 <a:ea typeface="メイリオ" pitchFamily="34" charset="-122"/>
                 <a:cs typeface="メイリオ" pitchFamily="34" charset="-120"/>
               </a:rPr>
@@ -1439,8 +1421,6 @@
                   <a:srgbClr val="FFFFFF"/>
                 </a:solidFill>
                 <a:latin typeface="メイリオ" pitchFamily="34" charset="0"/>
-                <a:ea typeface="メイリオ"/>
-                <a:cs typeface="メイリオ"/>
                 <a:ea typeface="メイリオ" pitchFamily="34" charset="-122"/>
                 <a:cs typeface="メイリオ" pitchFamily="34" charset="-120"/>
               </a:rPr>
@@ -1507,8 +1487,6 @@
                   <a:srgbClr val="0B7A3A"/>
                 </a:solidFill>
                 <a:latin typeface="メイリオ" pitchFamily="34" charset="0"/>
-                <a:ea typeface="メイリオ"/>
-                <a:cs typeface="メイリオ"/>
                 <a:ea typeface="メイリオ" pitchFamily="34" charset="-122"/>
                 <a:cs typeface="メイリオ" pitchFamily="34" charset="-120"/>
               </a:rPr>
@@ -1551,8 +1529,6 @@
                   <a:srgbClr val="1F285A"/>
                 </a:solidFill>
                 <a:latin typeface="メイリオ" pitchFamily="34" charset="0"/>
-                <a:ea typeface="メイリオ"/>
-                <a:cs typeface="メイリオ"/>
                 <a:ea typeface="メイリオ" pitchFamily="34" charset="-122"/>
                 <a:cs typeface="メイリオ" pitchFamily="34" charset="-120"/>
               </a:rPr>
@@ -1573,8 +1549,6 @@
                   <a:srgbClr val="333333"/>
                 </a:solidFill>
                 <a:latin typeface="メイリオ" pitchFamily="34" charset="0"/>
-                <a:ea typeface="メイリオ"/>
-                <a:cs typeface="メイリオ"/>
                 <a:ea typeface="メイリオ" pitchFamily="34" charset="-122"/>
                 <a:cs typeface="メイリオ" pitchFamily="34" charset="-120"/>
               </a:rPr>
@@ -1662,8 +1636,6 @@
                   <a:srgbClr val="FFFFFF"/>
                 </a:solidFill>
                 <a:latin typeface="メイリオ" pitchFamily="34" charset="0"/>
-                <a:ea typeface="メイリオ"/>
-                <a:cs typeface="メイリオ"/>
                 <a:ea typeface="メイリオ" pitchFamily="34" charset="-122"/>
                 <a:cs typeface="メイリオ" pitchFamily="34" charset="-120"/>
               </a:rPr>
@@ -1730,8 +1702,6 @@
                   <a:srgbClr val="1F285A"/>
                 </a:solidFill>
                 <a:latin typeface="メイリオ" pitchFamily="34" charset="0"/>
-                <a:ea typeface="メイリオ"/>
-                <a:cs typeface="メイリオ"/>
                 <a:ea typeface="メイリオ" pitchFamily="34" charset="-122"/>
                 <a:cs typeface="メイリオ" pitchFamily="34" charset="-120"/>
               </a:rPr>
@@ -1774,8 +1744,6 @@
                   <a:srgbClr val="1F285A"/>
                 </a:solidFill>
                 <a:latin typeface="メイリオ" pitchFamily="34" charset="0"/>
-                <a:ea typeface="メイリオ"/>
-                <a:cs typeface="メイリオ"/>
                 <a:ea typeface="メイリオ" pitchFamily="34" charset="-122"/>
                 <a:cs typeface="メイリオ" pitchFamily="34" charset="-120"/>
               </a:rPr>
@@ -1796,8 +1764,6 @@
                   <a:srgbClr val="333333"/>
                 </a:solidFill>
                 <a:latin typeface="メイリオ" pitchFamily="34" charset="0"/>
-                <a:ea typeface="メイリオ"/>
-                <a:cs typeface="メイリオ"/>
                 <a:ea typeface="メイリオ" pitchFamily="34" charset="-122"/>
                 <a:cs typeface="メイリオ" pitchFamily="34" charset="-120"/>
               </a:rPr>
@@ -1885,8 +1851,6 @@
                   <a:srgbClr val="FFFFFF"/>
                 </a:solidFill>
                 <a:latin typeface="メイリオ" pitchFamily="34" charset="0"/>
-                <a:ea typeface="メイリオ"/>
-                <a:cs typeface="メイリオ"/>
                 <a:ea typeface="メイリオ" pitchFamily="34" charset="-122"/>
                 <a:cs typeface="メイリオ" pitchFamily="34" charset="-120"/>
               </a:rPr>
@@ -1953,8 +1917,6 @@
                   <a:srgbClr val="0B7A3A"/>
                 </a:solidFill>
                 <a:latin typeface="メイリオ" pitchFamily="34" charset="0"/>
-                <a:ea typeface="メイリオ"/>
-                <a:cs typeface="メイリオ"/>
                 <a:ea typeface="メイリオ" pitchFamily="34" charset="-122"/>
                 <a:cs typeface="メイリオ" pitchFamily="34" charset="-120"/>
               </a:rPr>
@@ -1997,8 +1959,6 @@
                   <a:srgbClr val="1F285A"/>
                 </a:solidFill>
                 <a:latin typeface="メイリオ" pitchFamily="34" charset="0"/>
-                <a:ea typeface="メイリオ"/>
-                <a:cs typeface="メイリオ"/>
                 <a:ea typeface="メイリオ" pitchFamily="34" charset="-122"/>
                 <a:cs typeface="メイリオ" pitchFamily="34" charset="-120"/>
               </a:rPr>
@@ -2019,8 +1979,6 @@
                   <a:srgbClr val="333333"/>
                 </a:solidFill>
                 <a:latin typeface="メイリオ" pitchFamily="34" charset="0"/>
-                <a:ea typeface="メイリオ"/>
-                <a:cs typeface="メイリオ"/>
                 <a:ea typeface="メイリオ" pitchFamily="34" charset="-122"/>
                 <a:cs typeface="メイリオ" pitchFamily="34" charset="-120"/>
               </a:rPr>
@@ -2108,8 +2066,6 @@
                   <a:srgbClr val="FFFFFF"/>
                 </a:solidFill>
                 <a:latin typeface="メイリオ" pitchFamily="34" charset="0"/>
-                <a:ea typeface="メイリオ"/>
-                <a:cs typeface="メイリオ"/>
                 <a:ea typeface="メイリオ" pitchFamily="34" charset="-122"/>
                 <a:cs typeface="メイリオ" pitchFamily="34" charset="-120"/>
               </a:rPr>
@@ -2176,8 +2132,6 @@
                   <a:srgbClr val="0B7A3A"/>
                 </a:solidFill>
                 <a:latin typeface="メイリオ" pitchFamily="34" charset="0"/>
-                <a:ea typeface="メイリオ"/>
-                <a:cs typeface="メイリオ"/>
                 <a:ea typeface="メイリオ" pitchFamily="34" charset="-122"/>
                 <a:cs typeface="メイリオ" pitchFamily="34" charset="-120"/>
               </a:rPr>
@@ -2220,8 +2174,6 @@
                   <a:srgbClr val="1F285A"/>
                 </a:solidFill>
                 <a:latin typeface="メイリオ" pitchFamily="34" charset="0"/>
-                <a:ea typeface="メイリオ"/>
-                <a:cs typeface="メイリオ"/>
                 <a:ea typeface="メイリオ" pitchFamily="34" charset="-122"/>
                 <a:cs typeface="メイリオ" pitchFamily="34" charset="-120"/>
               </a:rPr>
@@ -2242,8 +2194,6 @@
                   <a:srgbClr val="333333"/>
                 </a:solidFill>
                 <a:latin typeface="メイリオ" pitchFamily="34" charset="0"/>
-                <a:ea typeface="メイリオ"/>
-                <a:cs typeface="メイリオ"/>
                 <a:ea typeface="メイリオ" pitchFamily="34" charset="-122"/>
                 <a:cs typeface="メイリオ" pitchFamily="34" charset="-120"/>
               </a:rPr>
@@ -2331,8 +2281,6 @@
                   <a:srgbClr val="FFFFFF"/>
                 </a:solidFill>
                 <a:latin typeface="メイリオ" pitchFamily="34" charset="0"/>
-                <a:ea typeface="メイリオ"/>
-                <a:cs typeface="メイリオ"/>
                 <a:ea typeface="メイリオ" pitchFamily="34" charset="-122"/>
                 <a:cs typeface="メイリオ" pitchFamily="34" charset="-120"/>
               </a:rPr>
@@ -2399,8 +2347,6 @@
                   <a:srgbClr val="D9661F"/>
                 </a:solidFill>
                 <a:latin typeface="メイリオ" pitchFamily="34" charset="0"/>
-                <a:ea typeface="メイリオ"/>
-                <a:cs typeface="メイリオ"/>
                 <a:ea typeface="メイリオ" pitchFamily="34" charset="-122"/>
                 <a:cs typeface="メイリオ" pitchFamily="34" charset="-120"/>
               </a:rPr>
@@ -2443,8 +2389,6 @@
                   <a:srgbClr val="1F285A"/>
                 </a:solidFill>
                 <a:latin typeface="メイリオ" pitchFamily="34" charset="0"/>
-                <a:ea typeface="メイリオ"/>
-                <a:cs typeface="メイリオ"/>
                 <a:ea typeface="メイリオ" pitchFamily="34" charset="-122"/>
                 <a:cs typeface="メイリオ" pitchFamily="34" charset="-120"/>
               </a:rPr>
@@ -2465,8 +2409,6 @@
                   <a:srgbClr val="333333"/>
                 </a:solidFill>
                 <a:latin typeface="メイリオ" pitchFamily="34" charset="0"/>
-                <a:ea typeface="メイリオ"/>
-                <a:cs typeface="メイリオ"/>
                 <a:ea typeface="メイリオ" pitchFamily="34" charset="-122"/>
                 <a:cs typeface="メイリオ" pitchFamily="34" charset="-120"/>
               </a:rPr>
@@ -2554,8 +2496,6 @@
                   <a:srgbClr val="FFFFFF"/>
                 </a:solidFill>
                 <a:latin typeface="メイリオ" pitchFamily="34" charset="0"/>
-                <a:ea typeface="メイリオ"/>
-                <a:cs typeface="メイリオ"/>
                 <a:ea typeface="メイリオ" pitchFamily="34" charset="-122"/>
                 <a:cs typeface="メイリオ" pitchFamily="34" charset="-120"/>
               </a:rPr>
@@ -2622,8 +2562,6 @@
                   <a:srgbClr val="1F285A"/>
                 </a:solidFill>
                 <a:latin typeface="メイリオ" pitchFamily="34" charset="0"/>
-                <a:ea typeface="メイリオ"/>
-                <a:cs typeface="メイリオ"/>
                 <a:ea typeface="メイリオ" pitchFamily="34" charset="-122"/>
                 <a:cs typeface="メイリオ" pitchFamily="34" charset="-120"/>
               </a:rPr>
@@ -2666,8 +2604,6 @@
                   <a:srgbClr val="1F285A"/>
                 </a:solidFill>
                 <a:latin typeface="メイリオ" pitchFamily="34" charset="0"/>
-                <a:ea typeface="メイリオ"/>
-                <a:cs typeface="メイリオ"/>
                 <a:ea typeface="メイリオ" pitchFamily="34" charset="-122"/>
                 <a:cs typeface="メイリオ" pitchFamily="34" charset="-120"/>
               </a:rPr>
@@ -2688,8 +2624,6 @@
                   <a:srgbClr val="333333"/>
                 </a:solidFill>
                 <a:latin typeface="メイリオ" pitchFamily="34" charset="0"/>
-                <a:ea typeface="メイリオ"/>
-                <a:cs typeface="メイリオ"/>
                 <a:ea typeface="メイリオ" pitchFamily="34" charset="-122"/>
                 <a:cs typeface="メイリオ" pitchFamily="34" charset="-120"/>
               </a:rPr>
@@ -2756,8 +2690,6 @@
                   <a:srgbClr val="1F285A"/>
                 </a:solidFill>
                 <a:latin typeface="メイリオ" pitchFamily="34" charset="0"/>
-                <a:ea typeface="メイリオ"/>
-                <a:cs typeface="メイリオ"/>
                 <a:ea typeface="メイリオ" pitchFamily="34" charset="-122"/>
                 <a:cs typeface="メイリオ" pitchFamily="34" charset="-120"/>
               </a:rPr>
@@ -2797,8 +2729,6 @@
                   <a:srgbClr val="333333"/>
                 </a:solidFill>
                 <a:latin typeface="メイリオ" pitchFamily="34" charset="0"/>
-                <a:ea typeface="メイリオ"/>
-                <a:cs typeface="メイリオ"/>
                 <a:ea typeface="メイリオ" pitchFamily="34" charset="-122"/>
                 <a:cs typeface="メイリオ" pitchFamily="34" charset="-120"/>
               </a:rPr>
@@ -2865,8 +2795,6 @@
                   <a:srgbClr val="1F285A"/>
                 </a:solidFill>
                 <a:latin typeface="メイリオ" pitchFamily="34" charset="0"/>
-                <a:ea typeface="メイリオ"/>
-                <a:cs typeface="メイリオ"/>
                 <a:ea typeface="メイリオ" pitchFamily="34" charset="-122"/>
                 <a:cs typeface="メイリオ" pitchFamily="34" charset="-120"/>
               </a:rPr>
@@ -2906,8 +2834,6 @@
                   <a:srgbClr val="6B7280"/>
                 </a:solidFill>
                 <a:latin typeface="メイリオ" pitchFamily="34" charset="0"/>
-                <a:ea typeface="メイリオ"/>
-                <a:cs typeface="メイリオ"/>
                 <a:ea typeface="メイリオ" pitchFamily="34" charset="-122"/>
                 <a:cs typeface="メイリオ" pitchFamily="34" charset="-120"/>
               </a:rPr>
@@ -2974,8 +2900,6 @@
                   <a:srgbClr val="1F285A"/>
                 </a:solidFill>
                 <a:latin typeface="メイリオ" pitchFamily="34" charset="0"/>
-                <a:ea typeface="メイリオ"/>
-                <a:cs typeface="メイリオ"/>
                 <a:ea typeface="メイリオ" pitchFamily="34" charset="-122"/>
                 <a:cs typeface="メイリオ" pitchFamily="34" charset="-120"/>
               </a:rPr>
@@ -3015,8 +2939,6 @@
                   <a:srgbClr val="6B7280"/>
                 </a:solidFill>
                 <a:latin typeface="メイリオ" pitchFamily="34" charset="0"/>
-                <a:ea typeface="メイリオ"/>
-                <a:cs typeface="メイリオ"/>
                 <a:ea typeface="メイリオ" pitchFamily="34" charset="-122"/>
                 <a:cs typeface="メイリオ" pitchFamily="34" charset="-120"/>
               </a:rPr>
@@ -3083,8 +3005,6 @@
                   <a:srgbClr val="1F285A"/>
                 </a:solidFill>
                 <a:latin typeface="メイリオ" pitchFamily="34" charset="0"/>
-                <a:ea typeface="メイリオ"/>
-                <a:cs typeface="メイリオ"/>
                 <a:ea typeface="メイリオ" pitchFamily="34" charset="-122"/>
                 <a:cs typeface="メイリオ" pitchFamily="34" charset="-120"/>
               </a:rPr>
@@ -3124,8 +3044,6 @@
                   <a:srgbClr val="6B7280"/>
                 </a:solidFill>
                 <a:latin typeface="メイリオ" pitchFamily="34" charset="0"/>
-                <a:ea typeface="メイリオ"/>
-                <a:cs typeface="メイリオ"/>
                 <a:ea typeface="メイリオ" pitchFamily="34" charset="-122"/>
                 <a:cs typeface="メイリオ" pitchFamily="34" charset="-120"/>
               </a:rPr>
@@ -3192,8 +3110,6 @@
                   <a:srgbClr val="1F285A"/>
                 </a:solidFill>
                 <a:latin typeface="メイリオ" pitchFamily="34" charset="0"/>
-                <a:ea typeface="メイリオ"/>
-                <a:cs typeface="メイリオ"/>
                 <a:ea typeface="メイリオ" pitchFamily="34" charset="-122"/>
                 <a:cs typeface="メイリオ" pitchFamily="34" charset="-120"/>
               </a:rPr>
@@ -3233,8 +3149,6 @@
                   <a:srgbClr val="6B7280"/>
                 </a:solidFill>
                 <a:latin typeface="メイリオ" pitchFamily="34" charset="0"/>
-                <a:ea typeface="メイリオ"/>
-                <a:cs typeface="メイリオ"/>
                 <a:ea typeface="メイリオ" pitchFamily="34" charset="-122"/>
                 <a:cs typeface="メイリオ" pitchFamily="34" charset="-120"/>
               </a:rPr>
@@ -3301,8 +3215,6 @@
                   <a:srgbClr val="1F285A"/>
                 </a:solidFill>
                 <a:latin typeface="メイリオ" pitchFamily="34" charset="0"/>
-                <a:ea typeface="メイリオ"/>
-                <a:cs typeface="メイリオ"/>
                 <a:ea typeface="メイリオ" pitchFamily="34" charset="-122"/>
                 <a:cs typeface="メイリオ" pitchFamily="34" charset="-120"/>
               </a:rPr>
@@ -3342,8 +3254,6 @@
                   <a:srgbClr val="6B7280"/>
                 </a:solidFill>
                 <a:latin typeface="メイリオ" pitchFamily="34" charset="0"/>
-                <a:ea typeface="メイリオ"/>
-                <a:cs typeface="メイリオ"/>
                 <a:ea typeface="メイリオ" pitchFamily="34" charset="-122"/>
                 <a:cs typeface="メイリオ" pitchFamily="34" charset="-120"/>
               </a:rPr>
@@ -3410,8 +3320,6 @@
                   <a:srgbClr val="FFFFFF"/>
                 </a:solidFill>
                 <a:latin typeface="メイリオ" pitchFamily="34" charset="0"/>
-                <a:ea typeface="メイリオ"/>
-                <a:cs typeface="メイリオ"/>
                 <a:ea typeface="メイリオ" pitchFamily="34" charset="-122"/>
                 <a:cs typeface="メイリオ" pitchFamily="34" charset="-120"/>
               </a:rPr>
@@ -3454,8 +3362,6 @@
                   <a:srgbClr val="0B7A3A"/>
                 </a:solidFill>
                 <a:latin typeface="メイリオ" pitchFamily="34" charset="0"/>
-                <a:ea typeface="メイリオ"/>
-                <a:cs typeface="メイリオ"/>
                 <a:ea typeface="メイリオ" pitchFamily="34" charset="-122"/>
                 <a:cs typeface="メイリオ" pitchFamily="34" charset="-120"/>
               </a:rPr>
@@ -3476,8 +3382,6 @@
                   <a:srgbClr val="0B7A3A"/>
                 </a:solidFill>
                 <a:latin typeface="メイリオ" pitchFamily="34" charset="0"/>
-                <a:ea typeface="メイリオ"/>
-                <a:cs typeface="メイリオ"/>
                 <a:ea typeface="メイリオ" pitchFamily="34" charset="-122"/>
                 <a:cs typeface="メイリオ" pitchFamily="34" charset="-120"/>
               </a:rPr>
@@ -3498,8 +3402,6 @@
                   <a:srgbClr val="0B7A3A"/>
                 </a:solidFill>
                 <a:latin typeface="メイリオ" pitchFamily="34" charset="0"/>
-                <a:ea typeface="メイリオ"/>
-                <a:cs typeface="メイリオ"/>
                 <a:ea typeface="メイリオ" pitchFamily="34" charset="-122"/>
                 <a:cs typeface="メイリオ" pitchFamily="34" charset="-120"/>
               </a:rPr>
@@ -3564,8 +3466,6 @@
                   <a:srgbClr val="FFFFFF"/>
                 </a:solidFill>
                 <a:latin typeface="メイリオ" pitchFamily="34" charset="0"/>
-                <a:ea typeface="メイリオ"/>
-                <a:cs typeface="メイリオ"/>
                 <a:ea typeface="メイリオ" pitchFamily="34" charset="-122"/>
                 <a:cs typeface="メイリオ" pitchFamily="34" charset="-120"/>
               </a:rPr>
